--- a/lecons/LSA/Climatology/LSA_CLIM_FS02_Weather_Observation_Prediction_Modification_and_Mapping.pptx
+++ b/lecons/LSA/Climatology/LSA_CLIM_FS02_Weather_Observation_Prediction_Modification_and_Mapping.pptx
@@ -3022,7 +3022,7 @@
           <a:p>
             <a:r>
               <a:rPr lang="en-US" dirty="0"/>
-              <a:t>Let us copy DEFINITIONS. The key terms of this lesson are defined as follows. Write each point on a new line, with the key term first. When you finish, we go to the next slide.</a:t>
+              <a:t>Let us copy the definitions. The key terms of this lesson are defined as follows. On this slide we have Weather observation and Weather forecast. Write each point on a new line, with the key term first, and explain it in your own words when we revise. When you finish, we go to the next slide.</a:t>
             </a:r>
             <a:endParaRPr lang="en-US" dirty="0"/>
           </a:p>
@@ -3110,7 +3110,7 @@
           <a:p>
             <a:r>
               <a:rPr lang="en-US" dirty="0"/>
-              <a:t>We continue with the same part. Write each point on a new line, with the key term first.</a:t>
+              <a:t>We continue with the definitions. On this slide we have Synoptic chart. Write each point on a new line, with the key term first, and explain it in your own words when we revise.</a:t>
             </a:r>
             <a:endParaRPr lang="en-US" dirty="0"/>
           </a:p>
@@ -3198,7 +3198,7 @@
           <a:p>
             <a:r>
               <a:rPr lang="en-US" dirty="0"/>
-              <a:t>Let us copy Weather Observation. Weather elements are observed with the following instruments. Write each point on a new line, with the key term first. When you finish, we go to the next slide.</a:t>
+              <a:t>Let us copy Weather Observation. Weather elements are observed with the following instruments. On this slide we have Ground instruments. Write each point on a new line, with the key term first, and explain it in your own words when we revise. When you finish, we go to the next slide.</a:t>
             </a:r>
             <a:endParaRPr lang="en-US" dirty="0"/>
           </a:p>
@@ -3286,7 +3286,7 @@
           <a:p>
             <a:r>
               <a:rPr lang="en-US" dirty="0"/>
-              <a:t>We continue with the same part. Write each point on a new line, with the key term first. When you finish, we go to the next slide.</a:t>
+              <a:t>We continue with Weather Observation. On this slide we have Radiosonde and Doppler radar. Write each point on a new line, with the key term first, and explain it in your own words when we revise. When you finish, we go to the next slide.</a:t>
             </a:r>
             <a:endParaRPr lang="en-US" dirty="0"/>
           </a:p>
@@ -3374,7 +3374,7 @@
           <a:p>
             <a:r>
               <a:rPr lang="en-US" dirty="0"/>
-              <a:t>We continue with the same part. Write each point on a new line, with the key term first.</a:t>
+              <a:t>We continue with Weather Observation. On this slide we have Weather satellites. Write each point on a new line, with the key term first, and explain it in your own words when we revise.</a:t>
             </a:r>
             <a:endParaRPr lang="en-US" dirty="0"/>
           </a:p>
@@ -3638,7 +3638,7 @@
           <a:p>
             <a:r>
               <a:rPr lang="en-US" dirty="0"/>
-              <a:t>Let us copy Weather Modification. People try to modify the weather in the following ways. Write each point on a new line, with the key term first. When you finish, we go to the next slide.</a:t>
+              <a:t>Let us copy Weather Modification. People try to modify the weather in the following ways. On this slide we have Cloud seeding. Write each point on a new line, with the key term first, and explain it in your own words when we revise. When you finish, we go to the next slide.</a:t>
             </a:r>
             <a:endParaRPr lang="en-US" dirty="0"/>
           </a:p>
@@ -3726,7 +3726,7 @@
           <a:p>
             <a:r>
               <a:rPr lang="en-US" dirty="0"/>
-              <a:t>We continue with the same part. Write each point on a new line, with the key term first.</a:t>
+              <a:t>We continue with Weather Modification. On this slide we have Hail suppression and fog dispersal and Hurricane modification. Write each point on a new line, with the key term first, and explain it in your own words when we revise.</a:t>
             </a:r>
             <a:endParaRPr lang="en-US" dirty="0"/>
           </a:p>
@@ -3814,7 +3814,7 @@
           <a:p>
             <a:r>
               <a:rPr lang="en-US" dirty="0"/>
-              <a:t>Let us copy Weather Mapping. Weather is mapped with synoptic charts. Write each point on a new line, with the key term first. When you finish, we go to the next slide.</a:t>
+              <a:t>Let us copy Weather Mapping. Weather is mapped with synoptic charts. On this slide we have Isobars and symbols. Write each point on a new line, with the key term first, and explain it in your own words when we revise. When you finish, we go to the next slide.</a:t>
             </a:r>
             <a:endParaRPr lang="en-US" dirty="0"/>
           </a:p>
@@ -3902,7 +3902,7 @@
           <a:p>
             <a:r>
               <a:rPr lang="en-US" dirty="0"/>
-              <a:t>We continue with the same part. Write each point on a new line, with the key term first.</a:t>
+              <a:t>We continue with Weather Mapping. On this slide we have Reading a chart. Write each point on a new line, with the key term first, and explain it in your own words when we revise.</a:t>
             </a:r>
             <a:endParaRPr lang="en-US" dirty="0"/>
           </a:p>
@@ -5222,7 +5222,7 @@
           <a:p>
             <a:r>
               <a:rPr lang="en-US" dirty="0"/>
-              <a:t>Here is the plan of our lesson today. We shall correction of the homework; then objectives and recall; then real-life situation and action to take; then learning activities; then board summary; then evaluation, remediation and homework.</a:t>
+              <a:t>Here is the plan of our lesson today. First, we shall correct the homework. Then we shall look at the objectives and recall what you already know. After that, we shall study a situation from real life and the action to take, and do the learning activities. Finally, we shall copy the board summary, do the evaluation and the remediation, and I will give you the homework.</a:t>
             </a:r>
             <a:endParaRPr lang="en-US" dirty="0"/>
           </a:p>
@@ -6762,7 +6762,7 @@
                 <a:ea typeface="Times New Roman" pitchFamily="34" charset="-122"/>
                 <a:cs typeface="Times New Roman" pitchFamily="34" charset="-120"/>
               </a:rPr>
-              <a:t>Further Study 2: Weather Observation, Prediction, Modification and Mapping</a:t>
+              <a:t>Further Study 2</a:t>
             </a:r>
             <a:endParaRPr lang="en-US" sz="2600" dirty="0"/>
           </a:p>
